--- a/docs/presentation/ppt/Aniverse_역할분담_옵션.pptx
+++ b/docs/presentation/ppt/Aniverse_역할분담_옵션.pptx
@@ -4790,7 +4790,7 @@
                 <a:ea typeface="맑은 고딕"/>
                 <a:cs typeface="맑은 고딕"/>
               </a:rPr>
-              <a:t>옵션 C  ·  2×2 그리드</a:t>
+              <a:t>옵션 C  ·  2×2 그리드 + 아이콘</a:t>
             </a:r>
           </a:p>
         </p:txBody>
@@ -4840,8 +4840,8 @@
         </p:nvSpPr>
         <p:spPr>
           <a:xfrm>
-            <a:off x="502920" y="1097280"/>
-            <a:ext cx="5394960" cy="2468880"/>
+            <a:off x="411480" y="1051560"/>
+            <a:ext cx="5486400" cy="2468880"/>
           </a:xfrm>
           <a:prstGeom prst="roundRect">
             <a:avLst/>
@@ -4874,6 +4874,55 @@
           <a:lstStyle/>
           <a:p>
             <a:pPr algn="ctr"/>
+          </a:p>
+        </p:txBody>
+      </p:sp>
+      <p:pic>
+        <p:nvPicPr>
+          <p:cNvPr id="6" name="Picture 5" descr="githubactions.png"/>
+          <p:cNvPicPr>
+            <a:picLocks noChangeAspect="1"/>
+          </p:cNvPicPr>
+          <p:nvPr/>
+        </p:nvPicPr>
+        <p:blipFill>
+          <a:blip r:embed="rId2"/>
+          <a:stretch>
+            <a:fillRect/>
+          </a:stretch>
+        </p:blipFill>
+        <p:spPr>
+          <a:xfrm>
+            <a:off x="667512" y="1554480"/>
+            <a:ext cx="777240" cy="777240"/>
+          </a:xfrm>
+          <a:prstGeom prst="rect">
+            <a:avLst/>
+          </a:prstGeom>
+        </p:spPr>
+      </p:pic>
+      <p:sp>
+        <p:nvSpPr>
+          <p:cNvPr id="7" name="TextBox 6"/>
+          <p:cNvSpPr txBox="1"/>
+          <p:nvPr/>
+        </p:nvSpPr>
+        <p:spPr>
+          <a:xfrm>
+            <a:off x="1645920" y="1252728"/>
+            <a:ext cx="4023360" cy="457200"/>
+          </a:xfrm>
+          <a:prstGeom prst="rect">
+            <a:avLst/>
+          </a:prstGeom>
+          <a:noFill/>
+        </p:spPr>
+        <p:txBody>
+          <a:bodyPr wrap="square" lIns="128016" rIns="128016" tIns="91440" bIns="91440">
+            <a:spAutoFit/>
+          </a:bodyPr>
+          <a:lstStyle/>
+          <a:p>
             <a:r>
               <a:rPr sz="2600" b="1">
                 <a:solidFill>
@@ -4884,6 +4933,78 @@
                 <a:cs typeface="맑은 고딕"/>
               </a:rPr>
               <a:t>김현우</a:t>
+            </a:r>
+          </a:p>
+        </p:txBody>
+      </p:sp>
+      <p:sp>
+        <p:nvSpPr>
+          <p:cNvPr id="8" name="TextBox 7"/>
+          <p:cNvSpPr txBox="1"/>
+          <p:nvPr/>
+        </p:nvSpPr>
+        <p:spPr>
+          <a:xfrm>
+            <a:off x="1645920" y="1737360"/>
+            <a:ext cx="4023360" cy="365760"/>
+          </a:xfrm>
+          <a:prstGeom prst="rect">
+            <a:avLst/>
+          </a:prstGeom>
+          <a:noFill/>
+        </p:spPr>
+        <p:txBody>
+          <a:bodyPr wrap="square" lIns="128016" rIns="128016" tIns="91440" bIns="91440">
+            <a:spAutoFit/>
+          </a:bodyPr>
+          <a:lstStyle/>
+          <a:p>
+            <a:r>
+              <a:rPr sz="1500" b="1">
+                <a:solidFill>
+                  <a:srgbClr val="0F172A"/>
+                </a:solidFill>
+                <a:latin typeface="맑은 고딕"/>
+                <a:ea typeface="맑은 고딕"/>
+                <a:cs typeface="맑은 고딕"/>
+              </a:rPr>
+              <a:t>DevOps / GitOps</a:t>
+            </a:r>
+          </a:p>
+        </p:txBody>
+      </p:sp>
+      <p:sp>
+        <p:nvSpPr>
+          <p:cNvPr id="9" name="TextBox 8"/>
+          <p:cNvSpPr txBox="1"/>
+          <p:nvPr/>
+        </p:nvSpPr>
+        <p:spPr>
+          <a:xfrm>
+            <a:off x="1645920" y="2240280"/>
+            <a:ext cx="4023360" cy="1097280"/>
+          </a:xfrm>
+          <a:prstGeom prst="rect">
+            <a:avLst/>
+          </a:prstGeom>
+          <a:noFill/>
+        </p:spPr>
+        <p:txBody>
+          <a:bodyPr wrap="square" lIns="128016" rIns="128016" tIns="91440" bIns="91440">
+            <a:spAutoFit/>
+          </a:bodyPr>
+          <a:lstStyle/>
+          <a:p>
+            <a:r>
+              <a:rPr sz="1600" b="0">
+                <a:solidFill>
+                  <a:srgbClr val="0F172A"/>
+                </a:solidFill>
+                <a:latin typeface="맑은 고딕"/>
+                <a:ea typeface="맑은 고딕"/>
+                <a:cs typeface="맑은 고딕"/>
+              </a:rPr>
+              <a:t>·  Actions · ECR</a:t>
             </a:r>
           </a:p>
           <a:p>
@@ -4893,7 +5014,7 @@
               </a:spcBef>
             </a:pPr>
             <a:r>
-              <a:rPr sz="1500" b="1">
+              <a:rPr sz="1600" b="0">
                 <a:solidFill>
                   <a:srgbClr val="0F172A"/>
                 </a:solidFill>
@@ -4901,39 +5022,39 @@
                 <a:ea typeface="맑은 고딕"/>
                 <a:cs typeface="맑은 고딕"/>
               </a:rPr>
-              <a:t>DevOps / GitOps</a:t>
+              <a:t>·  Argo CD</a:t>
             </a:r>
           </a:p>
           <a:p>
             <a:pPr>
               <a:spcBef>
-                <a:spcPts val="1200"/>
+                <a:spcPts val="800"/>
               </a:spcBef>
             </a:pPr>
             <a:r>
               <a:rPr sz="1600" b="0">
                 <a:solidFill>
-                  <a:srgbClr val="475569"/>
-                </a:solidFill>
-                <a:latin typeface="맑은 고딕"/>
-                <a:ea typeface="맑은 고딕"/>
-                <a:cs typeface="맑은 고딕"/>
-              </a:rPr>
-              <a:t>Actions · ECR  ·  Argo CD  ·  OIDC · 이관 복구</a:t>
-            </a:r>
-          </a:p>
-        </p:txBody>
-      </p:sp>
-      <p:sp>
-        <p:nvSpPr>
-          <p:cNvPr id="6" name="Rounded Rectangle 5"/>
+                  <a:srgbClr val="0F172A"/>
+                </a:solidFill>
+                <a:latin typeface="맑은 고딕"/>
+                <a:ea typeface="맑은 고딕"/>
+                <a:cs typeface="맑은 고딕"/>
+              </a:rPr>
+              <a:t>·  OIDC · 이관 복구</a:t>
+            </a:r>
+          </a:p>
+        </p:txBody>
+      </p:sp>
+      <p:sp>
+        <p:nvSpPr>
+          <p:cNvPr id="10" name="Rounded Rectangle 9"/>
           <p:cNvSpPr/>
           <p:nvPr/>
         </p:nvSpPr>
         <p:spPr>
           <a:xfrm>
-            <a:off x="6309360" y="1097280"/>
-            <a:ext cx="5394960" cy="2468880"/>
+            <a:off x="6263640" y="1051560"/>
+            <a:ext cx="5486400" cy="2468880"/>
           </a:xfrm>
           <a:prstGeom prst="roundRect">
             <a:avLst/>
@@ -4966,6 +5087,55 @@
           <a:lstStyle/>
           <a:p>
             <a:pPr algn="ctr"/>
+          </a:p>
+        </p:txBody>
+      </p:sp>
+      <p:pic>
+        <p:nvPicPr>
+          <p:cNvPr id="11" name="Picture 10" descr="vpc.png"/>
+          <p:cNvPicPr>
+            <a:picLocks noChangeAspect="1"/>
+          </p:cNvPicPr>
+          <p:nvPr/>
+        </p:nvPicPr>
+        <p:blipFill>
+          <a:blip r:embed="rId3"/>
+          <a:stretch>
+            <a:fillRect/>
+          </a:stretch>
+        </p:blipFill>
+        <p:spPr>
+          <a:xfrm>
+            <a:off x="6519672" y="1554480"/>
+            <a:ext cx="777240" cy="777240"/>
+          </a:xfrm>
+          <a:prstGeom prst="rect">
+            <a:avLst/>
+          </a:prstGeom>
+        </p:spPr>
+      </p:pic>
+      <p:sp>
+        <p:nvSpPr>
+          <p:cNvPr id="12" name="TextBox 11"/>
+          <p:cNvSpPr txBox="1"/>
+          <p:nvPr/>
+        </p:nvSpPr>
+        <p:spPr>
+          <a:xfrm>
+            <a:off x="7498079" y="1252728"/>
+            <a:ext cx="4023360" cy="457200"/>
+          </a:xfrm>
+          <a:prstGeom prst="rect">
+            <a:avLst/>
+          </a:prstGeom>
+          <a:noFill/>
+        </p:spPr>
+        <p:txBody>
+          <a:bodyPr wrap="square" lIns="128016" rIns="128016" tIns="91440" bIns="91440">
+            <a:spAutoFit/>
+          </a:bodyPr>
+          <a:lstStyle/>
+          <a:p>
             <a:r>
               <a:rPr sz="2600" b="1">
                 <a:solidFill>
@@ -4976,6 +5146,78 @@
                 <a:cs typeface="맑은 고딕"/>
               </a:rPr>
               <a:t>박서이</a:t>
+            </a:r>
+          </a:p>
+        </p:txBody>
+      </p:sp>
+      <p:sp>
+        <p:nvSpPr>
+          <p:cNvPr id="13" name="TextBox 12"/>
+          <p:cNvSpPr txBox="1"/>
+          <p:nvPr/>
+        </p:nvSpPr>
+        <p:spPr>
+          <a:xfrm>
+            <a:off x="7498079" y="1737360"/>
+            <a:ext cx="4023360" cy="365760"/>
+          </a:xfrm>
+          <a:prstGeom prst="rect">
+            <a:avLst/>
+          </a:prstGeom>
+          <a:noFill/>
+        </p:spPr>
+        <p:txBody>
+          <a:bodyPr wrap="square" lIns="128016" rIns="128016" tIns="91440" bIns="91440">
+            <a:spAutoFit/>
+          </a:bodyPr>
+          <a:lstStyle/>
+          <a:p>
+            <a:r>
+              <a:rPr sz="1500" b="1">
+                <a:solidFill>
+                  <a:srgbClr val="0F172A"/>
+                </a:solidFill>
+                <a:latin typeface="맑은 고딕"/>
+                <a:ea typeface="맑은 고딕"/>
+                <a:cs typeface="맑은 고딕"/>
+              </a:rPr>
+              <a:t>EKS · 네트워크 · 보안</a:t>
+            </a:r>
+          </a:p>
+        </p:txBody>
+      </p:sp>
+      <p:sp>
+        <p:nvSpPr>
+          <p:cNvPr id="14" name="TextBox 13"/>
+          <p:cNvSpPr txBox="1"/>
+          <p:nvPr/>
+        </p:nvSpPr>
+        <p:spPr>
+          <a:xfrm>
+            <a:off x="7498079" y="2240280"/>
+            <a:ext cx="4023360" cy="1097280"/>
+          </a:xfrm>
+          <a:prstGeom prst="rect">
+            <a:avLst/>
+          </a:prstGeom>
+          <a:noFill/>
+        </p:spPr>
+        <p:txBody>
+          <a:bodyPr wrap="square" lIns="128016" rIns="128016" tIns="91440" bIns="91440">
+            <a:spAutoFit/>
+          </a:bodyPr>
+          <a:lstStyle/>
+          <a:p>
+            <a:r>
+              <a:rPr sz="1600" b="0">
+                <a:solidFill>
+                  <a:srgbClr val="0F172A"/>
+                </a:solidFill>
+                <a:latin typeface="맑은 고딕"/>
+                <a:ea typeface="맑은 고딕"/>
+                <a:cs typeface="맑은 고딕"/>
+              </a:rPr>
+              <a:t>·  EKS · VPC</a:t>
             </a:r>
           </a:p>
           <a:p>
@@ -4985,7 +5227,7 @@
               </a:spcBef>
             </a:pPr>
             <a:r>
-              <a:rPr sz="1500" b="1">
+              <a:rPr sz="1600" b="0">
                 <a:solidFill>
                   <a:srgbClr val="0F172A"/>
                 </a:solidFill>
@@ -4993,39 +5235,39 @@
                 <a:ea typeface="맑은 고딕"/>
                 <a:cs typeface="맑은 고딕"/>
               </a:rPr>
-              <a:t>EKS · 네트워크 · 보안</a:t>
+              <a:t>·  Ingress · WAF · RBAC</a:t>
             </a:r>
           </a:p>
           <a:p>
             <a:pPr>
               <a:spcBef>
-                <a:spcPts val="1200"/>
+                <a:spcPts val="800"/>
               </a:spcBef>
             </a:pPr>
             <a:r>
               <a:rPr sz="1600" b="0">
                 <a:solidFill>
-                  <a:srgbClr val="475569"/>
-                </a:solidFill>
-                <a:latin typeface="맑은 고딕"/>
-                <a:ea typeface="맑은 고딕"/>
-                <a:cs typeface="맑은 고딕"/>
-              </a:rPr>
-              <a:t>EKS · VPC  ·  Ingress · WAF · RBAC  ·  노드 · NAT</a:t>
-            </a:r>
-          </a:p>
-        </p:txBody>
-      </p:sp>
-      <p:sp>
-        <p:nvSpPr>
-          <p:cNvPr id="7" name="Rounded Rectangle 6"/>
+                  <a:srgbClr val="0F172A"/>
+                </a:solidFill>
+                <a:latin typeface="맑은 고딕"/>
+                <a:ea typeface="맑은 고딕"/>
+                <a:cs typeface="맑은 고딕"/>
+              </a:rPr>
+              <a:t>·  노드 · NAT</a:t>
+            </a:r>
+          </a:p>
+        </p:txBody>
+      </p:sp>
+      <p:sp>
+        <p:nvSpPr>
+          <p:cNvPr id="15" name="Rounded Rectangle 14"/>
           <p:cNvSpPr/>
           <p:nvPr/>
         </p:nvSpPr>
         <p:spPr>
           <a:xfrm>
-            <a:off x="502920" y="3794760"/>
-            <a:ext cx="5394960" cy="2468880"/>
+            <a:off x="411480" y="3749039"/>
+            <a:ext cx="5486400" cy="2468880"/>
           </a:xfrm>
           <a:prstGeom prst="roundRect">
             <a:avLst/>
@@ -5058,6 +5300,55 @@
           <a:lstStyle/>
           <a:p>
             <a:pPr algn="ctr"/>
+          </a:p>
+        </p:txBody>
+      </p:sp>
+      <p:pic>
+        <p:nvPicPr>
+          <p:cNvPr id="16" name="Picture 15" descr="rds_maria.png"/>
+          <p:cNvPicPr>
+            <a:picLocks noChangeAspect="1"/>
+          </p:cNvPicPr>
+          <p:nvPr/>
+        </p:nvPicPr>
+        <p:blipFill>
+          <a:blip r:embed="rId4"/>
+          <a:stretch>
+            <a:fillRect/>
+          </a:stretch>
+        </p:blipFill>
+        <p:spPr>
+          <a:xfrm>
+            <a:off x="667512" y="4251959"/>
+            <a:ext cx="777240" cy="777240"/>
+          </a:xfrm>
+          <a:prstGeom prst="rect">
+            <a:avLst/>
+          </a:prstGeom>
+        </p:spPr>
+      </p:pic>
+      <p:sp>
+        <p:nvSpPr>
+          <p:cNvPr id="17" name="TextBox 16"/>
+          <p:cNvSpPr txBox="1"/>
+          <p:nvPr/>
+        </p:nvSpPr>
+        <p:spPr>
+          <a:xfrm>
+            <a:off x="1645920" y="3950207"/>
+            <a:ext cx="4023360" cy="457200"/>
+          </a:xfrm>
+          <a:prstGeom prst="rect">
+            <a:avLst/>
+          </a:prstGeom>
+          <a:noFill/>
+        </p:spPr>
+        <p:txBody>
+          <a:bodyPr wrap="square" lIns="128016" rIns="128016" tIns="91440" bIns="91440">
+            <a:spAutoFit/>
+          </a:bodyPr>
+          <a:lstStyle/>
+          <a:p>
             <a:r>
               <a:rPr sz="2600" b="1">
                 <a:solidFill>
@@ -5068,6 +5359,78 @@
                 <a:cs typeface="맑은 고딕"/>
               </a:rPr>
               <a:t>김윤주</a:t>
+            </a:r>
+          </a:p>
+        </p:txBody>
+      </p:sp>
+      <p:sp>
+        <p:nvSpPr>
+          <p:cNvPr id="18" name="TextBox 17"/>
+          <p:cNvSpPr txBox="1"/>
+          <p:nvPr/>
+        </p:nvSpPr>
+        <p:spPr>
+          <a:xfrm>
+            <a:off x="1645920" y="4434840"/>
+            <a:ext cx="4023360" cy="365760"/>
+          </a:xfrm>
+          <a:prstGeom prst="rect">
+            <a:avLst/>
+          </a:prstGeom>
+          <a:noFill/>
+        </p:spPr>
+        <p:txBody>
+          <a:bodyPr wrap="square" lIns="128016" rIns="128016" tIns="91440" bIns="91440">
+            <a:spAutoFit/>
+          </a:bodyPr>
+          <a:lstStyle/>
+          <a:p>
+            <a:r>
+              <a:rPr sz="1500" b="1">
+                <a:solidFill>
+                  <a:srgbClr val="0F172A"/>
+                </a:solidFill>
+                <a:latin typeface="맑은 고딕"/>
+                <a:ea typeface="맑은 고딕"/>
+                <a:cs typeface="맑은 고딕"/>
+              </a:rPr>
+              <a:t>컨테이너 · DB · 관측</a:t>
+            </a:r>
+          </a:p>
+        </p:txBody>
+      </p:sp>
+      <p:sp>
+        <p:nvSpPr>
+          <p:cNvPr id="19" name="TextBox 18"/>
+          <p:cNvSpPr txBox="1"/>
+          <p:nvPr/>
+        </p:nvSpPr>
+        <p:spPr>
+          <a:xfrm>
+            <a:off x="1645920" y="4937759"/>
+            <a:ext cx="4023360" cy="1097280"/>
+          </a:xfrm>
+          <a:prstGeom prst="rect">
+            <a:avLst/>
+          </a:prstGeom>
+          <a:noFill/>
+        </p:spPr>
+        <p:txBody>
+          <a:bodyPr wrap="square" lIns="128016" rIns="128016" tIns="91440" bIns="91440">
+            <a:spAutoFit/>
+          </a:bodyPr>
+          <a:lstStyle/>
+          <a:p>
+            <a:r>
+              <a:rPr sz="1600" b="0">
+                <a:solidFill>
+                  <a:srgbClr val="0F172A"/>
+                </a:solidFill>
+                <a:latin typeface="맑은 고딕"/>
+                <a:ea typeface="맑은 고딕"/>
+                <a:cs typeface="맑은 고딕"/>
+              </a:rPr>
+              <a:t>·  Docker · Helm</a:t>
             </a:r>
           </a:p>
           <a:p>
@@ -5077,7 +5440,7 @@
               </a:spcBef>
             </a:pPr>
             <a:r>
-              <a:rPr sz="1500" b="1">
+              <a:rPr sz="1600" b="0">
                 <a:solidFill>
                   <a:srgbClr val="0F172A"/>
                 </a:solidFill>
@@ -5085,39 +5448,39 @@
                 <a:ea typeface="맑은 고딕"/>
                 <a:cs typeface="맑은 고딕"/>
               </a:rPr>
-              <a:t>컨테이너 · DB · 관측</a:t>
+              <a:t>·  DB Pod · Backup</a:t>
             </a:r>
           </a:p>
           <a:p>
             <a:pPr>
               <a:spcBef>
-                <a:spcPts val="1200"/>
+                <a:spcPts val="800"/>
               </a:spcBef>
             </a:pPr>
             <a:r>
               <a:rPr sz="1600" b="0">
                 <a:solidFill>
-                  <a:srgbClr val="475569"/>
-                </a:solidFill>
-                <a:latin typeface="맑은 고딕"/>
-                <a:ea typeface="맑은 고딕"/>
-                <a:cs typeface="맑은 고딕"/>
-              </a:rPr>
-              <a:t>Docker · Helm  ·  DB Pod · Backup  ·  Tempo · Alert</a:t>
-            </a:r>
-          </a:p>
-        </p:txBody>
-      </p:sp>
-      <p:sp>
-        <p:nvSpPr>
-          <p:cNvPr id="8" name="Rounded Rectangle 7"/>
+                  <a:srgbClr val="0F172A"/>
+                </a:solidFill>
+                <a:latin typeface="맑은 고딕"/>
+                <a:ea typeface="맑은 고딕"/>
+                <a:cs typeface="맑은 고딕"/>
+              </a:rPr>
+              <a:t>·  Tempo · Alert</a:t>
+            </a:r>
+          </a:p>
+        </p:txBody>
+      </p:sp>
+      <p:sp>
+        <p:nvSpPr>
+          <p:cNvPr id="20" name="Rounded Rectangle 19"/>
           <p:cNvSpPr/>
           <p:nvPr/>
         </p:nvSpPr>
         <p:spPr>
           <a:xfrm>
-            <a:off x="6309360" y="3794760"/>
-            <a:ext cx="5394960" cy="2468880"/>
+            <a:off x="6263640" y="3749039"/>
+            <a:ext cx="5486400" cy="2468880"/>
           </a:xfrm>
           <a:prstGeom prst="roundRect">
             <a:avLst/>
@@ -5150,6 +5513,55 @@
           <a:lstStyle/>
           <a:p>
             <a:pPr algn="ctr"/>
+          </a:p>
+        </p:txBody>
+      </p:sp>
+      <p:pic>
+        <p:nvPicPr>
+          <p:cNvPr id="21" name="Picture 20" descr="alb.png"/>
+          <p:cNvPicPr>
+            <a:picLocks noChangeAspect="1"/>
+          </p:cNvPicPr>
+          <p:nvPr/>
+        </p:nvPicPr>
+        <p:blipFill>
+          <a:blip r:embed="rId5"/>
+          <a:stretch>
+            <a:fillRect/>
+          </a:stretch>
+        </p:blipFill>
+        <p:spPr>
+          <a:xfrm>
+            <a:off x="6519672" y="4251959"/>
+            <a:ext cx="777240" cy="777240"/>
+          </a:xfrm>
+          <a:prstGeom prst="rect">
+            <a:avLst/>
+          </a:prstGeom>
+        </p:spPr>
+      </p:pic>
+      <p:sp>
+        <p:nvSpPr>
+          <p:cNvPr id="22" name="TextBox 21"/>
+          <p:cNvSpPr txBox="1"/>
+          <p:nvPr/>
+        </p:nvSpPr>
+        <p:spPr>
+          <a:xfrm>
+            <a:off x="7498079" y="3950207"/>
+            <a:ext cx="4023360" cy="457200"/>
+          </a:xfrm>
+          <a:prstGeom prst="rect">
+            <a:avLst/>
+          </a:prstGeom>
+          <a:noFill/>
+        </p:spPr>
+        <p:txBody>
+          <a:bodyPr wrap="square" lIns="128016" rIns="128016" tIns="91440" bIns="91440">
+            <a:spAutoFit/>
+          </a:bodyPr>
+          <a:lstStyle/>
+          <a:p>
             <a:r>
               <a:rPr sz="2600" b="1">
                 <a:solidFill>
@@ -5160,6 +5572,78 @@
                 <a:cs typeface="맑은 고딕"/>
               </a:rPr>
               <a:t>강유민</a:t>
+            </a:r>
+          </a:p>
+        </p:txBody>
+      </p:sp>
+      <p:sp>
+        <p:nvSpPr>
+          <p:cNvPr id="23" name="TextBox 22"/>
+          <p:cNvSpPr txBox="1"/>
+          <p:nvPr/>
+        </p:nvSpPr>
+        <p:spPr>
+          <a:xfrm>
+            <a:off x="7498079" y="4434840"/>
+            <a:ext cx="4023360" cy="365760"/>
+          </a:xfrm>
+          <a:prstGeom prst="rect">
+            <a:avLst/>
+          </a:prstGeom>
+          <a:noFill/>
+        </p:spPr>
+        <p:txBody>
+          <a:bodyPr wrap="square" lIns="128016" rIns="128016" tIns="91440" bIns="91440">
+            <a:spAutoFit/>
+          </a:bodyPr>
+          <a:lstStyle/>
+          <a:p>
+            <a:r>
+              <a:rPr sz="1500" b="1">
+                <a:solidFill>
+                  <a:srgbClr val="0F172A"/>
+                </a:solidFill>
+                <a:latin typeface="맑은 고딕"/>
+                <a:ea typeface="맑은 고딕"/>
+                <a:cs typeface="맑은 고딕"/>
+              </a:rPr>
+              <a:t>창작마당 · Compute</a:t>
+            </a:r>
+          </a:p>
+        </p:txBody>
+      </p:sp>
+      <p:sp>
+        <p:nvSpPr>
+          <p:cNvPr id="24" name="TextBox 23"/>
+          <p:cNvSpPr txBox="1"/>
+          <p:nvPr/>
+        </p:nvSpPr>
+        <p:spPr>
+          <a:xfrm>
+            <a:off x="7498079" y="4937759"/>
+            <a:ext cx="4023360" cy="1097280"/>
+          </a:xfrm>
+          <a:prstGeom prst="rect">
+            <a:avLst/>
+          </a:prstGeom>
+          <a:noFill/>
+        </p:spPr>
+        <p:txBody>
+          <a:bodyPr wrap="square" lIns="128016" rIns="128016" tIns="91440" bIns="91440">
+            <a:spAutoFit/>
+          </a:bodyPr>
+          <a:lstStyle/>
+          <a:p>
+            <a:r>
+              <a:rPr sz="1600" b="0">
+                <a:solidFill>
+                  <a:srgbClr val="0F172A"/>
+                </a:solidFill>
+                <a:latin typeface="맑은 고딕"/>
+                <a:ea typeface="맑은 고딕"/>
+                <a:cs typeface="맑은 고딕"/>
+              </a:rPr>
+              <a:t>·  창작마당</a:t>
             </a:r>
           </a:p>
           <a:p>
@@ -5169,7 +5653,7 @@
               </a:spcBef>
             </a:pPr>
             <a:r>
-              <a:rPr sz="1500" b="1">
+              <a:rPr sz="1600" b="0">
                 <a:solidFill>
                   <a:srgbClr val="0F172A"/>
                 </a:solidFill>
@@ -5177,32 +5661,32 @@
                 <a:ea typeface="맑은 고딕"/>
                 <a:cs typeface="맑은 고딕"/>
               </a:rPr>
-              <a:t>창작마당 · Compute</a:t>
+              <a:t>·  노드 운영</a:t>
             </a:r>
           </a:p>
           <a:p>
             <a:pPr>
               <a:spcBef>
-                <a:spcPts val="1200"/>
+                <a:spcPts val="800"/>
               </a:spcBef>
             </a:pPr>
             <a:r>
               <a:rPr sz="1600" b="0">
                 <a:solidFill>
-                  <a:srgbClr val="475569"/>
-                </a:solidFill>
-                <a:latin typeface="맑은 고딕"/>
-                <a:ea typeface="맑은 고딕"/>
-                <a:cs typeface="맑은 고딕"/>
-              </a:rPr>
-              <a:t>창작마당  ·  노드 운영  ·  ALB · 트래픽</a:t>
-            </a:r>
-          </a:p>
-        </p:txBody>
-      </p:sp>
-      <p:sp>
-        <p:nvSpPr>
-          <p:cNvPr id="9" name="TextBox 8"/>
+                  <a:srgbClr val="0F172A"/>
+                </a:solidFill>
+                <a:latin typeface="맑은 고딕"/>
+                <a:ea typeface="맑은 고딕"/>
+                <a:cs typeface="맑은 고딕"/>
+              </a:rPr>
+              <a:t>·  ALB · 트래픽</a:t>
+            </a:r>
+          </a:p>
+        </p:txBody>
+      </p:sp>
+      <p:sp>
+        <p:nvSpPr>
+          <p:cNvPr id="25" name="TextBox 24"/>
           <p:cNvSpPr txBox="1"/>
           <p:nvPr/>
         </p:nvSpPr>

--- a/docs/presentation/ppt/Aniverse_역할분담_옵션.pptx
+++ b/docs/presentation/ppt/Aniverse_역할분담_옵션.pptx
@@ -4877,9 +4877,54 @@
           </a:p>
         </p:txBody>
       </p:sp>
+      <p:sp>
+        <p:nvSpPr>
+          <p:cNvPr id="6" name="Oval 5"/>
+          <p:cNvSpPr/>
+          <p:nvPr/>
+        </p:nvSpPr>
+        <p:spPr>
+          <a:xfrm>
+            <a:off x="667512" y="1645919"/>
+            <a:ext cx="1234440" cy="1234440"/>
+          </a:xfrm>
+          <a:prstGeom prst="ellipse">
+            <a:avLst/>
+          </a:prstGeom>
+          <a:solidFill>
+            <a:srgbClr val="FFFFFF"/>
+          </a:solidFill>
+          <a:ln w="19050">
+            <a:solidFill>
+              <a:srgbClr val="F97316"/>
+            </a:solidFill>
+          </a:ln>
+        </p:spPr>
+        <p:style>
+          <a:lnRef idx="1">
+            <a:schemeClr val="accent1"/>
+          </a:lnRef>
+          <a:fillRef idx="3">
+            <a:schemeClr val="accent1"/>
+          </a:fillRef>
+          <a:effectRef idx="2">
+            <a:schemeClr val="accent1"/>
+          </a:effectRef>
+          <a:fontRef idx="minor">
+            <a:schemeClr val="lt1"/>
+          </a:fontRef>
+        </p:style>
+        <p:txBody>
+          <a:bodyPr rtlCol="0" anchor="ctr"/>
+          <a:lstStyle/>
+          <a:p>
+            <a:pPr algn="ctr"/>
+          </a:p>
+        </p:txBody>
+      </p:sp>
       <p:pic>
         <p:nvPicPr>
-          <p:cNvPr id="6" name="Picture 5" descr="githubactions.png"/>
+          <p:cNvPr id="7" name="Picture 6" descr="githubactions.png"/>
           <p:cNvPicPr>
             <a:picLocks noChangeAspect="1"/>
           </p:cNvPicPr>
@@ -4893,8 +4938,8 @@
         </p:blipFill>
         <p:spPr>
           <a:xfrm>
-            <a:off x="667512" y="1554480"/>
-            <a:ext cx="777240" cy="777240"/>
+            <a:off x="822960" y="1801367"/>
+            <a:ext cx="914400" cy="914400"/>
           </a:xfrm>
           <a:prstGeom prst="rect">
             <a:avLst/>
@@ -4903,14 +4948,14 @@
       </p:pic>
       <p:sp>
         <p:nvSpPr>
-          <p:cNvPr id="7" name="TextBox 6"/>
+          <p:cNvPr id="8" name="TextBox 7"/>
           <p:cNvSpPr txBox="1"/>
           <p:nvPr/>
         </p:nvSpPr>
         <p:spPr>
           <a:xfrm>
-            <a:off x="1645920" y="1252728"/>
-            <a:ext cx="4023360" cy="457200"/>
+            <a:off x="2148840" y="1280160"/>
+            <a:ext cx="3474720" cy="457200"/>
           </a:xfrm>
           <a:prstGeom prst="rect">
             <a:avLst/>
@@ -4939,14 +4984,14 @@
       </p:sp>
       <p:sp>
         <p:nvSpPr>
-          <p:cNvPr id="8" name="TextBox 7"/>
+          <p:cNvPr id="9" name="TextBox 8"/>
           <p:cNvSpPr txBox="1"/>
           <p:nvPr/>
         </p:nvSpPr>
         <p:spPr>
           <a:xfrm>
-            <a:off x="1645920" y="1737360"/>
-            <a:ext cx="4023360" cy="365760"/>
+            <a:off x="2148840" y="1783080"/>
+            <a:ext cx="3474720" cy="365760"/>
           </a:xfrm>
           <a:prstGeom prst="rect">
             <a:avLst/>
@@ -4975,14 +5020,14 @@
       </p:sp>
       <p:sp>
         <p:nvSpPr>
-          <p:cNvPr id="9" name="TextBox 8"/>
+          <p:cNvPr id="10" name="TextBox 9"/>
           <p:cNvSpPr txBox="1"/>
           <p:nvPr/>
         </p:nvSpPr>
         <p:spPr>
           <a:xfrm>
-            <a:off x="1645920" y="2240280"/>
-            <a:ext cx="4023360" cy="1097280"/>
+            <a:off x="2148840" y="2286000"/>
+            <a:ext cx="3474720" cy="1051560"/>
           </a:xfrm>
           <a:prstGeom prst="rect">
             <a:avLst/>
@@ -5047,7 +5092,7 @@
       </p:sp>
       <p:sp>
         <p:nvSpPr>
-          <p:cNvPr id="10" name="Rounded Rectangle 9"/>
+          <p:cNvPr id="11" name="Rounded Rectangle 10"/>
           <p:cNvSpPr/>
           <p:nvPr/>
         </p:nvSpPr>
@@ -5090,9 +5135,54 @@
           </a:p>
         </p:txBody>
       </p:sp>
+      <p:sp>
+        <p:nvSpPr>
+          <p:cNvPr id="12" name="Oval 11"/>
+          <p:cNvSpPr/>
+          <p:nvPr/>
+        </p:nvSpPr>
+        <p:spPr>
+          <a:xfrm>
+            <a:off x="6519672" y="1645919"/>
+            <a:ext cx="1234440" cy="1234440"/>
+          </a:xfrm>
+          <a:prstGeom prst="ellipse">
+            <a:avLst/>
+          </a:prstGeom>
+          <a:solidFill>
+            <a:srgbClr val="FFFFFF"/>
+          </a:solidFill>
+          <a:ln w="19050">
+            <a:solidFill>
+              <a:srgbClr val="0EA5E9"/>
+            </a:solidFill>
+          </a:ln>
+        </p:spPr>
+        <p:style>
+          <a:lnRef idx="1">
+            <a:schemeClr val="accent1"/>
+          </a:lnRef>
+          <a:fillRef idx="3">
+            <a:schemeClr val="accent1"/>
+          </a:fillRef>
+          <a:effectRef idx="2">
+            <a:schemeClr val="accent1"/>
+          </a:effectRef>
+          <a:fontRef idx="minor">
+            <a:schemeClr val="lt1"/>
+          </a:fontRef>
+        </p:style>
+        <p:txBody>
+          <a:bodyPr rtlCol="0" anchor="ctr"/>
+          <a:lstStyle/>
+          <a:p>
+            <a:pPr algn="ctr"/>
+          </a:p>
+        </p:txBody>
+      </p:sp>
       <p:pic>
         <p:nvPicPr>
-          <p:cNvPr id="11" name="Picture 10" descr="vpc.png"/>
+          <p:cNvPr id="13" name="Picture 12" descr="vpc.png"/>
           <p:cNvPicPr>
             <a:picLocks noChangeAspect="1"/>
           </p:cNvPicPr>
@@ -5106,8 +5196,8 @@
         </p:blipFill>
         <p:spPr>
           <a:xfrm>
-            <a:off x="6519672" y="1554480"/>
-            <a:ext cx="777240" cy="777240"/>
+            <a:off x="6675120" y="1801367"/>
+            <a:ext cx="914400" cy="914400"/>
           </a:xfrm>
           <a:prstGeom prst="rect">
             <a:avLst/>
@@ -5116,14 +5206,14 @@
       </p:pic>
       <p:sp>
         <p:nvSpPr>
-          <p:cNvPr id="12" name="TextBox 11"/>
+          <p:cNvPr id="14" name="TextBox 13"/>
           <p:cNvSpPr txBox="1"/>
           <p:nvPr/>
         </p:nvSpPr>
         <p:spPr>
           <a:xfrm>
-            <a:off x="7498079" y="1252728"/>
-            <a:ext cx="4023360" cy="457200"/>
+            <a:off x="8001000" y="1280160"/>
+            <a:ext cx="3474720" cy="457200"/>
           </a:xfrm>
           <a:prstGeom prst="rect">
             <a:avLst/>
@@ -5152,14 +5242,14 @@
       </p:sp>
       <p:sp>
         <p:nvSpPr>
-          <p:cNvPr id="13" name="TextBox 12"/>
+          <p:cNvPr id="15" name="TextBox 14"/>
           <p:cNvSpPr txBox="1"/>
           <p:nvPr/>
         </p:nvSpPr>
         <p:spPr>
           <a:xfrm>
-            <a:off x="7498079" y="1737360"/>
-            <a:ext cx="4023360" cy="365760"/>
+            <a:off x="8001000" y="1783080"/>
+            <a:ext cx="3474720" cy="365760"/>
           </a:xfrm>
           <a:prstGeom prst="rect">
             <a:avLst/>
@@ -5188,14 +5278,14 @@
       </p:sp>
       <p:sp>
         <p:nvSpPr>
-          <p:cNvPr id="14" name="TextBox 13"/>
+          <p:cNvPr id="16" name="TextBox 15"/>
           <p:cNvSpPr txBox="1"/>
           <p:nvPr/>
         </p:nvSpPr>
         <p:spPr>
           <a:xfrm>
-            <a:off x="7498079" y="2240280"/>
-            <a:ext cx="4023360" cy="1097280"/>
+            <a:off x="8001000" y="2286000"/>
+            <a:ext cx="3474720" cy="1051560"/>
           </a:xfrm>
           <a:prstGeom prst="rect">
             <a:avLst/>
@@ -5260,7 +5350,7 @@
       </p:sp>
       <p:sp>
         <p:nvSpPr>
-          <p:cNvPr id="15" name="Rounded Rectangle 14"/>
+          <p:cNvPr id="17" name="Rounded Rectangle 16"/>
           <p:cNvSpPr/>
           <p:nvPr/>
         </p:nvSpPr>
@@ -5303,9 +5393,54 @@
           </a:p>
         </p:txBody>
       </p:sp>
+      <p:sp>
+        <p:nvSpPr>
+          <p:cNvPr id="18" name="Oval 17"/>
+          <p:cNvSpPr/>
+          <p:nvPr/>
+        </p:nvSpPr>
+        <p:spPr>
+          <a:xfrm>
+            <a:off x="667512" y="4343400"/>
+            <a:ext cx="1234440" cy="1234440"/>
+          </a:xfrm>
+          <a:prstGeom prst="ellipse">
+            <a:avLst/>
+          </a:prstGeom>
+          <a:solidFill>
+            <a:srgbClr val="FFFFFF"/>
+          </a:solidFill>
+          <a:ln w="19050">
+            <a:solidFill>
+              <a:srgbClr val="14B8A6"/>
+            </a:solidFill>
+          </a:ln>
+        </p:spPr>
+        <p:style>
+          <a:lnRef idx="1">
+            <a:schemeClr val="accent1"/>
+          </a:lnRef>
+          <a:fillRef idx="3">
+            <a:schemeClr val="accent1"/>
+          </a:fillRef>
+          <a:effectRef idx="2">
+            <a:schemeClr val="accent1"/>
+          </a:effectRef>
+          <a:fontRef idx="minor">
+            <a:schemeClr val="lt1"/>
+          </a:fontRef>
+        </p:style>
+        <p:txBody>
+          <a:bodyPr rtlCol="0" anchor="ctr"/>
+          <a:lstStyle/>
+          <a:p>
+            <a:pPr algn="ctr"/>
+          </a:p>
+        </p:txBody>
+      </p:sp>
       <p:pic>
         <p:nvPicPr>
-          <p:cNvPr id="16" name="Picture 15" descr="rds_maria.png"/>
+          <p:cNvPr id="19" name="Picture 18" descr="rds_maria.png"/>
           <p:cNvPicPr>
             <a:picLocks noChangeAspect="1"/>
           </p:cNvPicPr>
@@ -5319,8 +5454,8 @@
         </p:blipFill>
         <p:spPr>
           <a:xfrm>
-            <a:off x="667512" y="4251959"/>
-            <a:ext cx="777240" cy="777240"/>
+            <a:off x="822960" y="4498848"/>
+            <a:ext cx="914400" cy="914400"/>
           </a:xfrm>
           <a:prstGeom prst="rect">
             <a:avLst/>
@@ -5329,14 +5464,14 @@
       </p:pic>
       <p:sp>
         <p:nvSpPr>
-          <p:cNvPr id="17" name="TextBox 16"/>
+          <p:cNvPr id="20" name="TextBox 19"/>
           <p:cNvSpPr txBox="1"/>
           <p:nvPr/>
         </p:nvSpPr>
         <p:spPr>
           <a:xfrm>
-            <a:off x="1645920" y="3950207"/>
-            <a:ext cx="4023360" cy="457200"/>
+            <a:off x="2148840" y="3977639"/>
+            <a:ext cx="3474720" cy="457200"/>
           </a:xfrm>
           <a:prstGeom prst="rect">
             <a:avLst/>
@@ -5365,14 +5500,14 @@
       </p:sp>
       <p:sp>
         <p:nvSpPr>
-          <p:cNvPr id="18" name="TextBox 17"/>
+          <p:cNvPr id="21" name="TextBox 20"/>
           <p:cNvSpPr txBox="1"/>
           <p:nvPr/>
         </p:nvSpPr>
         <p:spPr>
           <a:xfrm>
-            <a:off x="1645920" y="4434840"/>
-            <a:ext cx="4023360" cy="365760"/>
+            <a:off x="2148840" y="4480559"/>
+            <a:ext cx="3474720" cy="365760"/>
           </a:xfrm>
           <a:prstGeom prst="rect">
             <a:avLst/>
@@ -5401,14 +5536,14 @@
       </p:sp>
       <p:sp>
         <p:nvSpPr>
-          <p:cNvPr id="19" name="TextBox 18"/>
+          <p:cNvPr id="22" name="TextBox 21"/>
           <p:cNvSpPr txBox="1"/>
           <p:nvPr/>
         </p:nvSpPr>
         <p:spPr>
           <a:xfrm>
-            <a:off x="1645920" y="4937759"/>
-            <a:ext cx="4023360" cy="1097280"/>
+            <a:off x="2148840" y="4983479"/>
+            <a:ext cx="3474720" cy="1051560"/>
           </a:xfrm>
           <a:prstGeom prst="rect">
             <a:avLst/>
@@ -5473,7 +5608,7 @@
       </p:sp>
       <p:sp>
         <p:nvSpPr>
-          <p:cNvPr id="20" name="Rounded Rectangle 19"/>
+          <p:cNvPr id="23" name="Rounded Rectangle 22"/>
           <p:cNvSpPr/>
           <p:nvPr/>
         </p:nvSpPr>
@@ -5516,9 +5651,54 @@
           </a:p>
         </p:txBody>
       </p:sp>
+      <p:sp>
+        <p:nvSpPr>
+          <p:cNvPr id="24" name="Oval 23"/>
+          <p:cNvSpPr/>
+          <p:nvPr/>
+        </p:nvSpPr>
+        <p:spPr>
+          <a:xfrm>
+            <a:off x="6519672" y="4343400"/>
+            <a:ext cx="1234440" cy="1234440"/>
+          </a:xfrm>
+          <a:prstGeom prst="ellipse">
+            <a:avLst/>
+          </a:prstGeom>
+          <a:solidFill>
+            <a:srgbClr val="FFFFFF"/>
+          </a:solidFill>
+          <a:ln w="19050">
+            <a:solidFill>
+              <a:srgbClr val="8B5CF6"/>
+            </a:solidFill>
+          </a:ln>
+        </p:spPr>
+        <p:style>
+          <a:lnRef idx="1">
+            <a:schemeClr val="accent1"/>
+          </a:lnRef>
+          <a:fillRef idx="3">
+            <a:schemeClr val="accent1"/>
+          </a:fillRef>
+          <a:effectRef idx="2">
+            <a:schemeClr val="accent1"/>
+          </a:effectRef>
+          <a:fontRef idx="minor">
+            <a:schemeClr val="lt1"/>
+          </a:fontRef>
+        </p:style>
+        <p:txBody>
+          <a:bodyPr rtlCol="0" anchor="ctr"/>
+          <a:lstStyle/>
+          <a:p>
+            <a:pPr algn="ctr"/>
+          </a:p>
+        </p:txBody>
+      </p:sp>
       <p:pic>
         <p:nvPicPr>
-          <p:cNvPr id="21" name="Picture 20" descr="alb.png"/>
+          <p:cNvPr id="25" name="Picture 24" descr="alb.png"/>
           <p:cNvPicPr>
             <a:picLocks noChangeAspect="1"/>
           </p:cNvPicPr>
@@ -5532,8 +5712,8 @@
         </p:blipFill>
         <p:spPr>
           <a:xfrm>
-            <a:off x="6519672" y="4251959"/>
-            <a:ext cx="777240" cy="777240"/>
+            <a:off x="6675120" y="4498848"/>
+            <a:ext cx="914400" cy="914400"/>
           </a:xfrm>
           <a:prstGeom prst="rect">
             <a:avLst/>
@@ -5542,14 +5722,14 @@
       </p:pic>
       <p:sp>
         <p:nvSpPr>
-          <p:cNvPr id="22" name="TextBox 21"/>
+          <p:cNvPr id="26" name="TextBox 25"/>
           <p:cNvSpPr txBox="1"/>
           <p:nvPr/>
         </p:nvSpPr>
         <p:spPr>
           <a:xfrm>
-            <a:off x="7498079" y="3950207"/>
-            <a:ext cx="4023360" cy="457200"/>
+            <a:off x="8001000" y="3977639"/>
+            <a:ext cx="3474720" cy="457200"/>
           </a:xfrm>
           <a:prstGeom prst="rect">
             <a:avLst/>
@@ -5578,14 +5758,14 @@
       </p:sp>
       <p:sp>
         <p:nvSpPr>
-          <p:cNvPr id="23" name="TextBox 22"/>
+          <p:cNvPr id="27" name="TextBox 26"/>
           <p:cNvSpPr txBox="1"/>
           <p:nvPr/>
         </p:nvSpPr>
         <p:spPr>
           <a:xfrm>
-            <a:off x="7498079" y="4434840"/>
-            <a:ext cx="4023360" cy="365760"/>
+            <a:off x="8001000" y="4480559"/>
+            <a:ext cx="3474720" cy="365760"/>
           </a:xfrm>
           <a:prstGeom prst="rect">
             <a:avLst/>
@@ -5614,14 +5794,14 @@
       </p:sp>
       <p:sp>
         <p:nvSpPr>
-          <p:cNvPr id="24" name="TextBox 23"/>
+          <p:cNvPr id="28" name="TextBox 27"/>
           <p:cNvSpPr txBox="1"/>
           <p:nvPr/>
         </p:nvSpPr>
         <p:spPr>
           <a:xfrm>
-            <a:off x="7498079" y="4937759"/>
-            <a:ext cx="4023360" cy="1097280"/>
+            <a:off x="8001000" y="4983479"/>
+            <a:ext cx="3474720" cy="1051560"/>
           </a:xfrm>
           <a:prstGeom prst="rect">
             <a:avLst/>
@@ -5686,7 +5866,7 @@
       </p:sp>
       <p:sp>
         <p:nvSpPr>
-          <p:cNvPr id="25" name="TextBox 24"/>
+          <p:cNvPr id="29" name="TextBox 28"/>
           <p:cNvSpPr txBox="1"/>
           <p:nvPr/>
         </p:nvSpPr>
